--- a/LLM_Assist_Final_Presentation_50_Slides.pptx
+++ b/LLM_Assist_Final_Presentation_50_Slides.pptx
@@ -6240,31 +6240,47 @@
               <a:defRPr sz="2000"/>
             </a:pPr>
             <a:r>
-              <a:t>Triage category accuracy: 1.0</a:t>
-            </a:r>
-          </a:p>
-          <a:p>
-            <a:pPr>
-              <a:defRPr sz="2000"/>
-            </a:pPr>
-            <a:r>
-              <a:t>Triage priority accuracy: 1.0</a:t>
-            </a:r>
-          </a:p>
-          <a:p>
-            <a:pPr>
-              <a:defRPr sz="2000"/>
-            </a:pPr>
-            <a:r>
-              <a:t>Quality mean score: 0.82</a:t>
-            </a:r>
-          </a:p>
-          <a:p>
-            <a:pPr>
-              <a:defRPr sz="2000"/>
-            </a:pPr>
-            <a:r>
-              <a:t>Summarization ROUGE-L F1: 1.0</a:t>
+              <a:t>Triage category accuracy: N/A</a:t>
+            </a:r>
+          </a:p>
+          <a:p>
+            <a:pPr>
+              <a:defRPr sz="2000"/>
+            </a:pPr>
+            <a:r>
+              <a:t>Triage category micro F1: N/A</a:t>
+            </a:r>
+          </a:p>
+          <a:p>
+            <a:pPr>
+              <a:defRPr sz="2000"/>
+            </a:pPr>
+            <a:r>
+              <a:t>Triage category macro F1: N/A</a:t>
+            </a:r>
+          </a:p>
+          <a:p>
+            <a:pPr>
+              <a:defRPr sz="2000"/>
+            </a:pPr>
+            <a:r>
+              <a:t>Triage priority accuracy: N/A</a:t>
+            </a:r>
+          </a:p>
+          <a:p>
+            <a:pPr>
+              <a:defRPr sz="2000"/>
+            </a:pPr>
+            <a:r>
+              <a:t>Quality mean score: N/A</a:t>
+            </a:r>
+          </a:p>
+          <a:p>
+            <a:pPr>
+              <a:defRPr sz="2000"/>
+            </a:pPr>
+            <a:r>
+              <a:t>Summarization ROUGE-L F1: N/A</a:t>
             </a:r>
           </a:p>
         </p:txBody>
@@ -6327,23 +6343,23 @@
               <a:defRPr sz="2000"/>
             </a:pPr>
             <a:r>
-              <a:t>Eval loss: 1.6342341899871826</a:t>
-            </a:r>
-          </a:p>
-          <a:p>
-            <a:pPr>
-              <a:defRPr sz="2000"/>
-            </a:pPr>
-            <a:r>
-              <a:t>Eval accuracy: 0.0</a:t>
-            </a:r>
-          </a:p>
-          <a:p>
-            <a:pPr>
-              <a:defRPr sz="2000"/>
-            </a:pPr>
-            <a:r>
-              <a:t>Eval runtime: 0.2742</a:t>
+              <a:t>Eval loss: 1.6039255857467651</a:t>
+            </a:r>
+          </a:p>
+          <a:p>
+            <a:pPr>
+              <a:defRPr sz="2000"/>
+            </a:pPr>
+            <a:r>
+              <a:t>Eval accuracy: 0.5</a:t>
+            </a:r>
+          </a:p>
+          <a:p>
+            <a:pPr>
+              <a:defRPr sz="2000"/>
+            </a:pPr>
+            <a:r>
+              <a:t>Eval runtime: 0.7725</a:t>
             </a:r>
           </a:p>
           <a:p>
